--- a/public/materialy/1L/6/Prezentace k hodinám/8. Závěrečný výstup a obhajoba.pptx
+++ b/public/materialy/1L/6/Prezentace k hodinám/8. Závěrečný výstup a obhajoba.pptx
@@ -521,6 +521,11 @@
               <a:t>Rozdej Závěrečný výstup.txt s rubrikou. Studenti ji musí mít před sebou od první minuty, protože se podle ní bude hodnotit.</a:t>
             </a:r>
           </a:p>
+          <a:p>
+            <a:r>
+              <a:t>Připrav si na projekci ukázku B z hodiny 7. Na konci hodiny zopakuješ test pěti sekund.</a:t>
+            </a:r>
+          </a:p>
           <a:p/>
           <a:p>
             <a:r>
@@ -545,7 +550,7 @@
           </a:p>
           <a:p>
             <a:r>
-              <a:t>Student propojí dovednosti z celého bloku do jednoho výstupu, doloží svá rozhodnutí a obhájí je.</a:t>
+              <a:t>Student propojí dovednosti z celého bloku do výstupu pro konkrétního čtenáře, ověří ho testem u spolužáka a obhájí svá rozhodnutí.</a:t>
             </a:r>
           </a:p>
           <a:p/>
@@ -556,7 +561,7 @@
           </a:p>
           <a:p>
             <a:r>
-              <a:t>Hotový výstup, vyplněný technický list a tři věty obhajoby.</a:t>
+              <a:t>Hotový výstup, technický list se zápisem testu a tři věty obhajoby.</a:t>
             </a:r>
           </a:p>
           <a:p/>
@@ -567,7 +572,7 @@
           </a:p>
           <a:p>
             <a:r>
-              <a:t>5 min volba a plán · 7 min kritéria · 22 min tvorba · 8 min obhajoby · 3 min shrnutí bloku.</a:t>
+              <a:t>5 min volba a pro koho · 7 min kritéria · 22 min tvorba a test pěti sekund · 8 min obhajoby · 3 min shrnutí bloku.</a:t>
             </a:r>
           </a:p>
         </p:txBody>
@@ -653,7 +658,7 @@
           </a:p>
           <a:p>
             <a:r>
-              <a:t>„Napište si plán. Co uděláte, v jakém nástroji a v jakém formátu to uložíte. Tři řádky stačí.“</a:t>
+              <a:t>„Napište si nahoru dvě věty: Určeno pro… a Čtenář má pochopit… Pak plán: co uděláte, v jakém nástroji a v jakém formátu to uložíte. Pět řádků stačí.“</a:t>
             </a:r>
           </a:p>
           <a:p/>
@@ -665,6 +670,11 @@
           <a:p>
             <a:r>
               <a:t>Trvej na tom, aby plán vznikl dřív než první klik. Kdo začne dřív, skončí u výstupu bez formátu a bez zdůvodnění.</a:t>
+            </a:r>
+          </a:p>
+          <a:p>
+            <a:r>
+              <a:t>Téma si každý volí sám uvnitř varianty: svůj sport, kapelu, obor, kroužek. Vlastní téma táhne, varianta hlídá povinné prvky.</a:t>
             </a:r>
           </a:p>
           <a:p>
@@ -771,7 +781,12 @@
           </a:p>
           <a:p>
             <a:r>
-              <a:t>K bodu 03: „A poslední: ke každému rozhodnutí patří důvod. Nestačí, že to tak je. Musíte umět říct proč.“</a:t>
+              <a:t>K bodu 03: „Ke každému rozhodnutí patří důvod. A jestli výstup funguje, neurčíte vy, ale čtenář: v půlce hodiny ho na pět sekund ukážete spolužákovi a opravíte, co nepochopil.“</a:t>
+            </a:r>
+          </a:p>
+          <a:p>
+            <a:r>
+              <a:t>Pravidlo pro AI řekni hned teď: „AI smíte použít, třeba na nápad nebo obrázek. Do technického listu ale napíšete, na co a v jakém nástroji. Obhajujete svoje volby, takže musíte umět říct, proč jste výsledek vzali nebo upravili.“</a:t>
             </a:r>
           </a:p>
           <a:p>
@@ -790,6 +805,11 @@
               <a:t>Projdi rubriku bod po bodu a u každého řekni, jak vypadá plný počet bodů. Pět minut tady ušetří dvacet dohadování při hodnocení.</a:t>
             </a:r>
           </a:p>
+          <a:p>
+            <a:r>
+              <a:t>Nové je kritérium Srozumitelnost: dva body dostane výstup, na kterém spolužák do pěti sekund najde to, co má čtenář pochopit, a test s opravou je zapsaný v technickém listu.</a:t>
+            </a:r>
+          </a:p>
           <a:p/>
           <a:p>
             <a:r>
@@ -799,6 +819,11 @@
           <a:p>
             <a:r>
               <a:t>Nepředváděj nástroje znovu. Kdo je neovládá, doučí se to od spolužáka rychleji než z projekce.</a:t>
+            </a:r>
+          </a:p>
+          <a:p>
+            <a:r>
+              <a:t>Když pravidla školy nebo podmínky AI nástroje použití pro mladší studenty nedovolují, platí ta přísnější.</a:t>
             </a:r>
           </a:p>
         </p:txBody>
@@ -874,7 +899,7 @@
           <a:p/>
           <a:p>
             <a:r>
-              <a:t>12–34 MIN · SAMOSTATNÁ PRÁCE</a:t>
+              <a:t>12–28 MIN · SAMOSTATNÁ PRÁCE</a:t>
             </a:r>
           </a:p>
           <a:p>
@@ -889,23 +914,39 @@
           </a:p>
           <a:p>
             <a:r>
-              <a:t>Ve 30. minutě řekni nahlas: „Za čtyři minuty končí tvorba. Kdo ještě nemá technický list, nechte výstup být a doplňte list.“</a:t>
+              <a:t>Ve 26. minutě řekni nahlas: „Za dvě minuty test. Ukazuje se i rozpracovaný výstup.“</a:t>
             </a:r>
           </a:p>
           <a:p/>
           <a:p>
             <a:r>
+              <a:t>28–34 MIN · TEST PĚTI SEKUND A OPRAVA</a:t>
+            </a:r>
+          </a:p>
+          <a:p>
+            <a:r>
+              <a:t>Dvojice si ukážou výstup na pět sekund. Spolužák řekne jen tři věty ze zadání: „Nejdřív jsem se podíval na…“, „Hlavní je podle mě…“, „Nejasné mi bylo…“.</a:t>
+            </a:r>
+          </a:p>
+          <a:p>
+            <a:r>
+              <a:t>Pevné věty nejsou formalita. Bez nich se patnáctiletí shazují nebo chválí naprázdno. Kdo řekne „je to hnusný“ nebo „dobrý“, vrať ho k větám.</a:t>
+            </a:r>
+          </a:p>
+          <a:p>
+            <a:r>
+              <a:t>Autor porovná, co slyšel, se svou větou „Čtenář má pochopit“, opraví jednu věc a obojí zapíše do technického listu.</a:t>
+            </a:r>
+          </a:p>
+          <a:p/>
+          <a:p>
+            <a:r>
               <a:t>34–42 MIN · OBHAJOBY</a:t>
             </a:r>
           </a:p>
           <a:p>
             <a:r>
-              <a:t>Šedesát sekund na studenta a měř to. Tři věty: co jsem zvolil, proč, co bych udělal jinak.</a:t>
-            </a:r>
-          </a:p>
-          <a:p>
-            <a:r>
-              <a:t>Při dvaceti studentech se všichni nevejdou. Vyber osm až deset tak, aby zazněly všechny tři varianty, ostatní odevzdají obhajobu písemně.</a:t>
+              <a:t>Nejdřív ve dvojicích u stolu naráz, čtyři minuty: každý řekne tři věty — co jsem zvolil, proč, co bych udělal jinak. Pak dva až tři vybrané výstupy před třídou tak, aby zazněly různé varianty. Obhajoby jednoho po druhém se do osmi minut nevejdou.</a:t>
             </a:r>
           </a:p>
           <a:p>
@@ -921,7 +962,7 @@
           </a:p>
           <a:p>
             <a:r>
-              <a:t>Vrať se k první hodině: „Začínali jsme otázkou, jaký soubor si vyžádáte od grafika na logo na plachtu. Kdo by to dneska zdůvodnil jinak?“</a:t>
+              <a:t>Nejdřív test pěti sekund na ukázce B (další snímek), pak otázka z první hodiny: „Začínali jsme otázkou, jaký soubor si vyžádáte od grafika na logo na plachtu. Kdo by to dneska zdůvodnil jinak?“</a:t>
             </a:r>
           </a:p>
           <a:p/>
@@ -932,7 +973,7 @@
           </a:p>
           <a:p>
             <a:r>
-              <a:t>Hotový výstup, vyplněný technický list a tři věty obhajoby.</a:t>
+              <a:t>Hotový výstup, technický list se zápisem testu a tři věty obhajoby.</a:t>
             </a:r>
           </a:p>
         </p:txBody>
@@ -1111,6 +1152,17 @@
           <a:p/>
           <a:p>
             <a:r>
+              <a:t>TEST PĚTI SEKUND, PODRUHÉ</a:t>
+            </a:r>
+          </a:p>
+          <a:p>
+            <a:r>
+              <a:t>Promítni ukázku B z hodiny 7 na pět sekund a vypni. „Jednou větou na lísteček: co je na ní hlavní?“ Lístečky po hodině spočítej stejně jako v hodině 7: kolik studentů napsalo titulek jako fakt a kolik poznalo, že graf klame. Rozdíl těch dvou čísel ukáže, jestli blok zabral.</a:t>
+            </a:r>
+          </a:p>
+          <a:p/>
+          <a:p>
+            <a:r>
               <a:t>CO ŘEKNEŠ</a:t>
             </a:r>
           </a:p>
@@ -1137,7 +1189,7 @@
           </a:p>
           <a:p>
             <a:r>
-              <a:t>Rastr a vektor: značka vektorově, fotografie rastrově, kombinace je běžná.</a:t>
+              <a:t>Pro čtenáře: výstup funguje, když ho pochopí ten, pro koho je. Ověří to test pěti sekund.</a:t>
             </a:r>
           </a:p>
           <a:p>
@@ -1266,7 +1318,7 @@
           </a:p>
           <a:p>
             <a:r>
-              <a:t>Konkrétní a použitelné zásady: „originál nikdy nepřepisuj“, „osa od nuly“, „co nefunguje v 16 px, není ikona“, „formát se vybírá podle obsahu, ne podle zvyku“.</a:t>
+              <a:t>Konkrétní a použitelné zásady: „originál nikdy nepřepisuj“, „osa od nuly“, „co nefunguje v 16 px, není ikona“, „formát se vybírá podle obsahu, ne podle zvyku“, „co spolužák nepochopí za pět sekund, není hotové“.</a:t>
             </a:r>
           </a:p>
           <a:p>
@@ -4508,7 +4560,7 @@
                 </a:solidFill>
                 <a:latin typeface="Calibri"/>
               </a:rPr>
-              <a:t>Student propojí dovednosti z celého bloku do jednoho výstupu, doloží svá rozhodnutí a obhájí je.</a:t>
+              <a:t>Student propojí dovednosti z celého bloku do výstupu pro konkrétního čtenáře, ověří ho testem u spolužáka a obhájí svá rozhodnutí.</a:t>
             </a:r>
           </a:p>
         </p:txBody>
@@ -4981,7 +5033,7 @@
                 </a:solidFill>
                 <a:latin typeface="Calibri"/>
               </a:rPr>
-              <a:t>A plakát, B značka a karta, nebo C infografika.</a:t>
+              <a:t>A plakát, B značka a karta, nebo C infografika. Téma si zvol sám.</a:t>
             </a:r>
           </a:p>
         </p:txBody>
@@ -5016,7 +5068,7 @@
                 </a:solidFill>
                 <a:latin typeface="Calibri"/>
               </a:rPr>
-              <a:t>NAPLÁNUJ</a:t>
+              <a:t>PRO KOHO</a:t>
             </a:r>
           </a:p>
         </p:txBody>
@@ -5055,7 +5107,7 @@
                 </a:solidFill>
                 <a:latin typeface="Calibri"/>
               </a:rPr>
-              <a:t>Napiš, co uděláš v jakém nástroji a v jakém formátu uložíš.</a:t>
+              <a:t>Napiš: Určeno pro… a Čtenář má pochopit…</a:t>
             </a:r>
           </a:p>
         </p:txBody>
@@ -5090,7 +5142,7 @@
                 </a:solidFill>
                 <a:latin typeface="Calibri"/>
               </a:rPr>
-              <a:t>KRITÉRIA</a:t>
+              <a:t>NAPLÁNUJ</a:t>
             </a:r>
           </a:p>
         </p:txBody>
@@ -5129,7 +5181,7 @@
                 </a:solidFill>
                 <a:latin typeface="Calibri"/>
               </a:rPr>
-              <a:t>Přečti si rubriku dřív, než začneš.</a:t>
+              <a:t>Nástroj a formát. Rubriku si přečti dřív, než začneš.</a:t>
             </a:r>
           </a:p>
         </p:txBody>
@@ -5830,7 +5882,7 @@
                 </a:solidFill>
                 <a:latin typeface="Calibri"/>
               </a:rPr>
-              <a:t>Doložení</a:t>
+              <a:t>Test a doložení</a:t>
             </a:r>
           </a:p>
         </p:txBody>
@@ -5869,7 +5921,7 @@
                 </a:solidFill>
                 <a:latin typeface="Calibri"/>
               </a:rPr>
-              <a:t>Ke každému rozhodnutí patří důvod, ne jen výsledek.</a:t>
+              <a:t>Test pěti sekund u spolužáka a důvod ke každému rozhodnutí.</a:t>
             </a:r>
           </a:p>
         </p:txBody>
@@ -6443,7 +6495,7 @@
                 </a:solidFill>
                 <a:latin typeface="Calibri"/>
               </a:rPr>
-              <a:t>Technický list</a:t>
+              <a:t>Test pěti sekund</a:t>
             </a:r>
           </a:p>
         </p:txBody>
@@ -6482,7 +6534,7 @@
                 </a:solidFill>
                 <a:latin typeface="Calibri"/>
               </a:rPr>
-              <a:t>Zapiš rozměry, formáty, velikosti souborů a použité nástroje.</a:t>
+              <a:t>Spolužák řekne pevné věty ze zadání. Oprav, co nepochopil.</a:t>
             </a:r>
           </a:p>
         </p:txBody>
@@ -6552,7 +6604,7 @@
                 </a:solidFill>
                 <a:latin typeface="Calibri"/>
               </a:rPr>
-              <a:t>Obhajoba</a:t>
+              <a:t>List a obhajoba</a:t>
             </a:r>
           </a:p>
         </p:txBody>
@@ -6591,7 +6643,7 @@
                 </a:solidFill>
                 <a:latin typeface="Calibri"/>
               </a:rPr>
-              <a:t>Připrav tři věty: co jsi zvolil, proč a co bys udělal jinak.</a:t>
+              <a:t>Technický list včetně AI a tři věty: co, proč, co jinak.</a:t>
             </a:r>
           </a:p>
         </p:txBody>
@@ -6705,7 +6757,7 @@
                 </a:solidFill>
                 <a:latin typeface="Calibri"/>
               </a:rPr>
-              <a:t>Hotový výstup, vyplněný technický list a tři věty obhajoby.</a:t>
+              <a:t>Hotový výstup, technický list se zápisem testu a tři věty obhajoby.</a:t>
             </a:r>
           </a:p>
         </p:txBody>
@@ -7025,7 +7077,7 @@
                 </a:solidFill>
                 <a:latin typeface="Calibri"/>
               </a:rPr>
-              <a:t>Výstup splňuje všechny povinné prvky zadání.</a:t>
+              <a:t>Výstup má všechny povinné prvky a větu „Určeno pro…“.</a:t>
             </a:r>
           </a:p>
         </p:txBody>
@@ -7099,7 +7151,7 @@
                 </a:solidFill>
                 <a:latin typeface="Calibri"/>
               </a:rPr>
-              <a:t>Technický list obsahuje rozměry, formáty i velikosti.</a:t>
+              <a:t>Technický list má rozměry, formáty, velikosti i použití AI.</a:t>
             </a:r>
           </a:p>
         </p:txBody>
@@ -7173,7 +7225,7 @@
                 </a:solidFill>
                 <a:latin typeface="Calibri"/>
               </a:rPr>
-              <a:t>U volby formátu máš uvedený důvod.</a:t>
+              <a:t>Po testu pěti sekund jsi opravil, co spolužák nepochopil.</a:t>
             </a:r>
           </a:p>
         </p:txBody>
@@ -7646,7 +7698,7 @@
                 </a:solidFill>
                 <a:latin typeface="Calibri"/>
               </a:rPr>
-              <a:t>Rastr a vektor</a:t>
+              <a:t>Pro čtenáře</a:t>
             </a:r>
           </a:p>
         </p:txBody>
@@ -7685,7 +7737,7 @@
                 </a:solidFill>
                 <a:latin typeface="Calibri"/>
               </a:rPr>
-              <a:t>Značka vektorově, fotografie rastrově; kombinace je běžná.</a:t>
+              <a:t>Výstup funguje, když ho pochopí ten, pro koho je. Ověří to test.</a:t>
             </a:r>
           </a:p>
         </p:txBody>

--- a/public/materialy/1L/6/Prezentace k hodinám/8. Závěrečný výstup a obhajoba.pptx
+++ b/public/materialy/1L/6/Prezentace k hodinám/8. Závěrečný výstup a obhajoba.pptx
@@ -930,7 +930,7 @@
           </a:p>
           <a:p>
             <a:r>
-              <a:t>Pevné věty nejsou formalita. Bez nich se patnáctiletí shazují nebo chválí naprázdno. Kdo řekne „je to hnusný“ nebo „dobrý“, vrať ho k větám.</a:t>
+              <a:t>Pevné věty nejsou formalita. Bez nich se žáci shazují nebo chválí naprázdno. Kdo řekne „je to hnusný“ nebo „dobrý“, vrať ho k větám.</a:t>
             </a:r>
           </a:p>
           <a:p>
